--- a/companies/calderwood-partners/Engagements/Garza, Leblanc and Porter/2009.08.15 - Briefing Deck - Garza, Leblanc and Porter.pptx
+++ b/companies/calderwood-partners/Engagements/Garza, Leblanc and Porter/2009.08.15 - Briefing Deck - Garza, Leblanc and Porter.pptx
@@ -3139,33 +3139,9 @@
             </a:r>
           </a:p>
           <a:p>
-            <a:pPr lvl="1"/>
-            <a:r>
-              <a:t>Client of record: Garza, Leblanc and Porter</a:t>
-            </a:r>
-          </a:p>
-          <a:p>
-            <a:pPr lvl="1"/>
-            <a:r>
-              <a:t>Engagement commenced June 22, 2009</a:t>
-            </a:r>
-          </a:p>
-          <a:p>
-            <a:pPr lvl="1"/>
-            <a:r>
-              <a:t>Prepared for Barbara Ward, Director of Operations</a:t>
-            </a:r>
-          </a:p>
-          <a:p>
-            <a:pPr lvl="1"/>
-            <a:r>
-              <a:t>Prepared by Mary Parker, with Deborah Gordon and Brenda Rodriguez</a:t>
-            </a:r>
-          </a:p>
-          <a:p>
-            <a:pPr lvl="1"/>
-            <a:r>
-              <a:t>An early-phase briefing, not a set of conclusions</a:t>
+            <a:pPr/>
+            <a:r>
+              <a:t>An interim briefing on the pricing engagement, prepared for Barbara Ward and the leadership team by the Calderwood engagement team. This is a read-out of where the work sits and what we are asking of you, not a set of conclusions; those come later, and only once the numbers behind them are settled with your team.</a:t>
             </a:r>
           </a:p>
         </p:txBody>
@@ -3209,7 +3185,7 @@
                   <a:srgbClr val="4A2E2A"/>
                 </a:solidFill>
               </a:rPr>
-              <a:t>The question we are here to answer</a:t>
+              <a:t>Where the Engagement Stands</a:t>
             </a:r>
           </a:p>
         </p:txBody>
@@ -3231,25 +3207,25 @@
           <a:p>
             <a:pPr lvl="1"/>
             <a:r>
-              <a:t>Why the prices you set on paper are not the prices you collect</a:t>
+              <a:t>The engagement opened on June 22, 2009 and is in its early weeks.</a:t>
             </a:r>
           </a:p>
           <a:p>
             <a:pPr lvl="1"/>
             <a:r>
-              <a:t>Where your margin is strong and where it quietly erodes</a:t>
+              <a:t>We are still gathering and reconciling the present-state picture, so nothing here is a recommendation yet.</a:t>
             </a:r>
           </a:p>
           <a:p>
             <a:pPr lvl="1"/>
             <a:r>
-              <a:t>How prices are set today, and who along the way may discount</a:t>
+              <a:t>Where a figure is still moving, we have said so rather than round it off to look finished.</a:t>
             </a:r>
           </a:p>
           <a:p>
             <a:pPr lvl="1"/>
             <a:r>
-              <a:t>What a pricing approach you can actually run would look like</a:t>
+              <a:t>Today's purpose is to share what the work has surfaced so far and to agree the questions worth pursuing next.</a:t>
             </a:r>
           </a:p>
         </p:txBody>
@@ -3293,7 +3269,7 @@
                   <a:srgbClr val="4A2E2A"/>
                 </a:solidFill>
               </a:rPr>
-              <a:t>How we are working</a:t>
+              <a:t>Your Engagement Team</a:t>
             </a:r>
           </a:p>
         </p:txBody>
@@ -3315,25 +3291,19 @@
           <a:p>
             <a:pPr lvl="1"/>
             <a:r>
-              <a:t>From your own invoice and rebate data, not from rules of thumb</a:t>
+              <a:t>Brenda Rodriguez, Senior Consultant, owns the present-state pricing and the pricing model the recommendations will rest on.</a:t>
             </a:r>
           </a:p>
           <a:p>
             <a:pPr lvl="1"/>
             <a:r>
-              <a:t>Every figure traceable to a workpaper we can produce on request</a:t>
+              <a:t>Deborah Gordon, Associate, leads the market and competitor benchmark and the workbook behind it.</a:t>
             </a:r>
           </a:p>
           <a:p>
             <a:pPr lvl="1"/>
             <a:r>
-              <a:t>Findings and recommendations kept separate and clearly labeled</a:t>
-            </a:r>
-          </a:p>
-          <a:p>
-            <a:pPr lvl="1"/>
-            <a:r>
-              <a:t>Interim reads shared with you as they firm up, not held to the end</a:t>
+              <a:t>Mary Parker, Research Associate, assembles the company and market background and keeps every source on file.</a:t>
             </a:r>
           </a:p>
         </p:txBody>
@@ -3377,7 +3347,7 @@
                   <a:srgbClr val="4A2E2A"/>
                 </a:solidFill>
               </a:rPr>
-              <a:t>What we can see so far</a:t>
+              <a:t>What the Work Has Shown So Far</a:t>
             </a:r>
           </a:p>
         </p:txBody>
@@ -3397,9 +3367,27 @@
           <a:bodyPr/>
           <a:lstStyle/>
           <a:p>
-            <a:pPr/>
-            <a:r>
-              <a:t>Two things stand out even at this early stage, and both need more work before we would put a number on either. The gap between what you list and what you actually collect is real and worth measuring precisely. And the discounting is not spread evenly: it concentrates in the largest accounts, several of which carry allowances that never reach the standard price sheets. We offer these as directions to look, not as conclusions.</a:t>
+            <a:pPr lvl="1"/>
+            <a:r>
+              <a:t>Prices are set consistently in the largest line, but the logic varies line to line elsewhere, which is where the early attention belongs.</a:t>
+            </a:r>
+          </a:p>
+          <a:p>
+            <a:pPr lvl="1"/>
+            <a:r>
+              <a:t>Because that logic varies, the same product can carry different margins depending on who quoted it.</a:t>
+            </a:r>
+          </a:p>
+          <a:p>
+            <a:pPr lvl="1"/>
+            <a:r>
+              <a:t>The benchmark points to room to move on a handful of mid-volume products where the firm is priced below the nearest competitors.</a:t>
+            </a:r>
+          </a:p>
+          <a:p>
+            <a:pPr lvl="1"/>
+            <a:r>
+              <a:t>A small number of pricing schedules are still being reconciled with your team before we treat the present-state picture as settled.</a:t>
             </a:r>
           </a:p>
         </p:txBody>
@@ -3443,7 +3431,7 @@
                   <a:srgbClr val="4A2E2A"/>
                 </a:solidFill>
               </a:rPr>
-              <a:t>What we are still working through</a:t>
+              <a:t>The Questions Ahead</a:t>
             </a:r>
           </a:p>
         </p:txBody>
@@ -3465,19 +3453,25 @@
           <a:p>
             <a:pPr lvl="1"/>
             <a:r>
-              <a:t>Reconciling two years of rebates and allowances against the invoice records</a:t>
+              <a:t>Where price can be held, where it can prudently be moved, and by how much the evidence will actually support.</a:t>
             </a:r>
           </a:p>
           <a:p>
             <a:pPr lvl="1"/>
             <a:r>
-              <a:t>Interviews on who quotes and who may discount, now getting under way</a:t>
+              <a:t>How much of the apparent room to move is durable, as against a competitor's short-term promotion we should not chase.</a:t>
             </a:r>
           </a:p>
           <a:p>
             <a:pPr lvl="1"/>
             <a:r>
-              <a:t>How the off-sheet allowances on the major accounts were first agreed</a:t>
+              <a:t>How to put the discipline for setting price on a firmer footing than it now rests on.</a:t>
+            </a:r>
+          </a:p>
+          <a:p>
+            <a:pPr lvl="1"/>
+            <a:r>
+              <a:t>Which changes the organization can absorb first without unsettling what is already working.</a:t>
             </a:r>
           </a:p>
         </p:txBody>
@@ -3521,7 +3515,7 @@
                   <a:srgbClr val="4A2E2A"/>
                 </a:solidFill>
               </a:rPr>
-              <a:t>Where we go from here</a:t>
+              <a:t>Next Steps</a:t>
             </a:r>
           </a:p>
         </p:txBody>
@@ -3543,25 +3537,25 @@
           <a:p>
             <a:pPr lvl="1"/>
             <a:r>
-              <a:t>Close out the realization and margin diagnostic</a:t>
+              <a:t>Close out the remaining pricing schedules with your team this week.</a:t>
             </a:r>
           </a:p>
           <a:p>
             <a:pPr lvl="1"/>
             <a:r>
-              <a:t>Finish the pricing-authority interviews with your sales managers</a:t>
+              <a:t>Hold the working session to review the benchmark in full.</a:t>
             </a:r>
           </a:p>
           <a:p>
             <a:pPr lvl="1"/>
             <a:r>
-              <a:t>Bring a first set of findings, labeled as findings, to the next session</a:t>
+              <a:t>Separate the durable price gaps from the promotion-driven ones before anything is proposed.</a:t>
             </a:r>
           </a:p>
           <a:p>
             <a:pPr lvl="1"/>
             <a:r>
-              <a:t>Keep routing data requests through Barbara Ward's office</a:t>
+              <a:t>Agree the two or three questions the strategy turns on, so the next phase begins with a clear mandate.</a:t>
             </a:r>
           </a:p>
         </p:txBody>
